--- a/a7/packages/A7 Unit 6 - Relationships in Triangles/Lessons/6.07/A7 6.07 Similar Triangles; Indirect Measurement - Slides.pptx
+++ b/a7/packages/A7 Unit 6 - Relationships in Triangles/Lessons/6.07/A7 6.07 Similar Triangles; Indirect Measurement - Slides.pptx
@@ -3730,7 +3730,7 @@
                 </a:solidFill>
                 <a:latin typeface="Lexend"/>
               </a:rPr>
-              <a:t>A similar triangle's shortest side is 12. Find its other two sides.</a:t>
+              <a:t>A similar triangle has sides 28, x and 12. Find x.</a:t>
             </a:r>
           </a:p>
         </p:txBody>
@@ -4028,14 +4028,49 @@
                 </a:solidFill>
                 <a:latin typeface="Lexend"/>
               </a:rPr>
-              <a:t>A similar triangle's shortest side is 12. Find its other two sides.</a:t>
+              <a:t>A similar triangle has sides 28, x and 12. Find x.</a:t>
+            </a:r>
+          </a:p>
+        </p:txBody>
+      </p:sp>
+      <p:sp>
+        <p:nvSpPr>
+          <p:cNvPr id="10" name="TextBox 9"/>
+          <p:cNvSpPr txBox="1"/>
+          <p:nvPr/>
+        </p:nvSpPr>
+        <p:spPr>
+          <a:xfrm>
+            <a:off x="3937137" y="2728688"/>
+            <a:ext cx="4424404" cy="457200"/>
+          </a:xfrm>
+          <a:prstGeom prst="rect">
+            <a:avLst/>
+          </a:prstGeom>
+          <a:noFill/>
+        </p:spPr>
+        <p:txBody>
+          <a:bodyPr wrap="none" lIns="45720" rIns="45720" tIns="18288" bIns="18288" anchor="ctr">
+            <a:noAutofit/>
+          </a:bodyPr>
+          <a:lstStyle/>
+          <a:p>
+            <a:pPr algn="l"/>
+            <a:r>
+              <a:rPr sz="2330" b="0" i="0">
+                <a:solidFill>
+                  <a:srgbClr val="1A1A1A"/>
+                </a:solidFill>
+                <a:latin typeface="Lexend"/>
+              </a:rPr>
+              <a:t>sorted:  3, 5, 7  and  12, x, 28</a:t>
             </a:r>
           </a:p>
         </p:txBody>
       </p:sp>
       <p:pic>
         <p:nvPicPr>
-          <p:cNvPr id="10" name="Picture 9" descr="3ee810834057249b.png"/>
+          <p:cNvPr id="11" name="Picture 10" descr="0019a33274271f50.png"/>
           <p:cNvPicPr>
             <a:picLocks noChangeAspect="1"/>
           </p:cNvPicPr>
@@ -4049,8 +4084,8 @@
         </p:blipFill>
         <p:spPr>
           <a:xfrm>
-            <a:off x="4490147" y="2751548"/>
-            <a:ext cx="1444752" cy="606552"/>
+            <a:off x="3992001" y="3254468"/>
+            <a:ext cx="1222248" cy="512064"/>
           </a:xfrm>
           <a:prstGeom prst="rect">
             <a:avLst/>
@@ -4059,7 +4094,7 @@
       </p:pic>
       <p:pic>
         <p:nvPicPr>
-          <p:cNvPr id="11" name="Picture 10" descr="100b1b51da19dd07.png"/>
+          <p:cNvPr id="12" name="Picture 11" descr="7329a68ab6aef0ec.png"/>
           <p:cNvPicPr>
             <a:picLocks noChangeAspect="1"/>
           </p:cNvPicPr>
@@ -4073,8 +4108,8 @@
         </p:blipFill>
         <p:spPr>
           <a:xfrm>
-            <a:off x="4490147" y="3583081"/>
-            <a:ext cx="1417320" cy="252984"/>
+            <a:off x="3992001" y="3970082"/>
+            <a:ext cx="1648968" cy="213360"/>
           </a:xfrm>
           <a:prstGeom prst="rect">
             <a:avLst/>
@@ -4083,66 +4118,7 @@
       </p:pic>
       <p:sp>
         <p:nvSpPr>
-          <p:cNvPr id="12" name="TextBox 11"/>
-          <p:cNvSpPr txBox="1"/>
-          <p:nvPr/>
-        </p:nvSpPr>
-        <p:spPr>
-          <a:xfrm>
-            <a:off x="5907467" y="3463256"/>
-            <a:ext cx="620905" cy="457200"/>
-          </a:xfrm>
-          <a:prstGeom prst="rect">
-            <a:avLst/>
-          </a:prstGeom>
-          <a:noFill/>
-        </p:spPr>
-        <p:txBody>
-          <a:bodyPr wrap="none" lIns="45720" rIns="45720" tIns="18288" bIns="18288" anchor="ctr">
-            <a:noAutofit/>
-          </a:bodyPr>
-          <a:lstStyle/>
-          <a:p>
-            <a:pPr algn="l"/>
-            <a:r>
-              <a:rPr sz="2750" b="0" i="0">
-                <a:solidFill>
-                  <a:srgbClr val="1A1A1A"/>
-                </a:solidFill>
-                <a:latin typeface="Lexend"/>
-              </a:rPr>
-              <a:t>,   </a:t>
-            </a:r>
-          </a:p>
-        </p:txBody>
-      </p:sp>
-      <p:pic>
-        <p:nvPicPr>
-          <p:cNvPr id="13" name="Picture 12" descr="a5ec2c20a171f586.png"/>
-          <p:cNvPicPr>
-            <a:picLocks noChangeAspect="1"/>
-          </p:cNvPicPr>
-          <p:nvPr/>
-        </p:nvPicPr>
-        <p:blipFill>
-          <a:blip r:embed="rId4"/>
-          <a:stretch>
-            <a:fillRect/>
-          </a:stretch>
-        </p:blipFill>
-        <p:spPr>
-          <a:xfrm>
-            <a:off x="6391212" y="3580033"/>
-            <a:ext cx="1386840" cy="252984"/>
-          </a:xfrm>
-          <a:prstGeom prst="rect">
-            <a:avLst/>
-          </a:prstGeom>
-        </p:spPr>
-      </p:pic>
-      <p:sp>
-        <p:nvSpPr>
-          <p:cNvPr id="14" name="TextBox 13"/>
+          <p:cNvPr id="13" name="TextBox 12"/>
           <p:cNvSpPr txBox="1"/>
           <p:nvPr/>
         </p:nvSpPr>
@@ -4170,7 +4146,7 @@
                 </a:solidFill>
                 <a:latin typeface="Lexend"/>
               </a:rPr>
-              <a:t>Answer:   20 and 28</a:t>
+              <a:t>Answer:   x = 20</a:t>
             </a:r>
           </a:p>
         </p:txBody>
@@ -4411,7 +4387,7 @@
         </p:nvSpPr>
         <p:spPr>
           <a:xfrm>
-            <a:off x="777240" y="1673740"/>
+            <a:off x="777240" y="1463040"/>
             <a:ext cx="10607040" cy="429370"/>
           </a:xfrm>
           <a:prstGeom prst="rect">
@@ -4433,7 +4409,7 @@
                 </a:solidFill>
                 <a:latin typeface="Lexend"/>
               </a:rPr>
-              <a:t>A 5-ft girl casts a 3-ft shadow. At the same moment,</a:t>
+              <a:t>Omar's eyes are 5 ft up, 4 ft from a mirror on the ground.</a:t>
             </a:r>
           </a:p>
         </p:txBody>
@@ -4446,7 +4422,7 @@
         </p:nvSpPr>
         <p:spPr>
           <a:xfrm>
-            <a:off x="777240" y="2212838"/>
+            <a:off x="777240" y="2002138"/>
             <a:ext cx="10607040" cy="429370"/>
           </a:xfrm>
           <a:prstGeom prst="rect">
@@ -4468,14 +4444,49 @@
                 </a:solidFill>
                 <a:latin typeface="Lexend"/>
               </a:rPr>
-              <a:t>a flagpole casts a 15-ft shadow.</a:t>
+              <a:t>In it he sees the top of a tree 18 ft beyond the mirror.</a:t>
+            </a:r>
+          </a:p>
+        </p:txBody>
+      </p:sp>
+      <p:sp>
+        <p:nvSpPr>
+          <p:cNvPr id="10" name="TextBox 9"/>
+          <p:cNvSpPr txBox="1"/>
+          <p:nvPr/>
+        </p:nvSpPr>
+        <p:spPr>
+          <a:xfrm>
+            <a:off x="777240" y="2541236"/>
+            <a:ext cx="10607040" cy="429370"/>
+          </a:xfrm>
+          <a:prstGeom prst="rect">
+            <a:avLst/>
+          </a:prstGeom>
+          <a:noFill/>
+        </p:spPr>
+        <p:txBody>
+          <a:bodyPr wrap="square" lIns="45720" rIns="45720" tIns="18288" bIns="18288" anchor="t">
+            <a:spAutoFit/>
+          </a:bodyPr>
+          <a:lstStyle/>
+          <a:p>
+            <a:pPr algn="ctr"/>
+            <a:r>
+              <a:rPr sz="2280" b="0" i="0">
+                <a:solidFill>
+                  <a:srgbClr val="1A1A1A"/>
+                </a:solidFill>
+                <a:latin typeface="Lexend"/>
+              </a:rPr>
+              <a:t>The two right triangles are similar.</a:t>
             </a:r>
           </a:p>
         </p:txBody>
       </p:sp>
       <p:pic>
         <p:nvPicPr>
-          <p:cNvPr id="10" name="Picture 9" descr="g0cfc49998507ca95.png"/>
+          <p:cNvPr id="11" name="Picture 10" descr="gcccabea20ad63071.png"/>
           <p:cNvPicPr>
             <a:picLocks noChangeAspect="1"/>
           </p:cNvPicPr>
@@ -4489,8 +4500,8 @@
         </p:blipFill>
         <p:spPr>
           <a:xfrm>
-            <a:off x="4572000" y="2751936"/>
-            <a:ext cx="3017520" cy="2560727"/>
+            <a:off x="4937130" y="3080335"/>
+            <a:ext cx="2287258" cy="2242157"/>
           </a:xfrm>
           <a:prstGeom prst="rect">
             <a:avLst/>
@@ -4499,13 +4510,13 @@
       </p:pic>
       <p:sp>
         <p:nvSpPr>
-          <p:cNvPr id="11" name="TextBox 10"/>
-          <p:cNvSpPr txBox="1"/>
-          <p:nvPr/>
-        </p:nvSpPr>
-        <p:spPr>
-          <a:xfrm>
-            <a:off x="777240" y="5641848"/>
+          <p:cNvPr id="12" name="TextBox 11"/>
+          <p:cNvSpPr txBox="1"/>
+          <p:nvPr/>
+        </p:nvSpPr>
+        <p:spPr>
+          <a:xfrm>
+            <a:off x="777240" y="5651676"/>
             <a:ext cx="10607040" cy="429370"/>
           </a:xfrm>
           <a:prstGeom prst="rect">
@@ -4527,7 +4538,7 @@
                 </a:solidFill>
                 <a:latin typeface="Lexend"/>
               </a:rPr>
-              <a:t>How tall is the flagpole?</a:t>
+              <a:t>How tall is the tree?</a:t>
             </a:r>
           </a:p>
         </p:txBody>
@@ -4762,7 +4773,7 @@
       </p:sp>
       <p:pic>
         <p:nvPicPr>
-          <p:cNvPr id="8" name="Picture 7" descr="c5833f2d00d703a7.png"/>
+          <p:cNvPr id="8" name="Picture 7" descr="6bd577f60b4023a4.png"/>
           <p:cNvPicPr>
             <a:picLocks noChangeAspect="1"/>
           </p:cNvPicPr>
@@ -4777,7 +4788,7 @@
         <p:spPr>
           <a:xfrm>
             <a:off x="1828800" y="1920240"/>
-            <a:ext cx="1575816" cy="673608"/>
+            <a:ext cx="1905000" cy="667512"/>
           </a:xfrm>
           <a:prstGeom prst="rect">
             <a:avLst/>
@@ -4786,7 +4797,7 @@
       </p:pic>
       <p:pic>
         <p:nvPicPr>
-          <p:cNvPr id="9" name="Picture 8" descr="04445b739800caa2.png"/>
+          <p:cNvPr id="9" name="Picture 8" descr="035eeeba9ebb9621.png"/>
           <p:cNvPicPr>
             <a:picLocks noChangeAspect="1"/>
           </p:cNvPicPr>
@@ -4800,8 +4811,8 @@
         </p:blipFill>
         <p:spPr>
           <a:xfrm>
-            <a:off x="1828800" y="2868168"/>
-            <a:ext cx="2103120" cy="289560"/>
+            <a:off x="1828800" y="2862072"/>
+            <a:ext cx="2731008" cy="289560"/>
           </a:xfrm>
           <a:prstGeom prst="rect">
             <a:avLst/>
@@ -4838,7 +4849,7 @@
                 </a:solidFill>
                 <a:latin typeface="Lexend"/>
               </a:rPr>
-              <a:t>Answer:   The flagpole is 25 ft tall.</a:t>
+              <a:t>Answer:   The tree is 22.5 ft tall.</a:t>
             </a:r>
           </a:p>
         </p:txBody>
@@ -5101,7 +5112,7 @@
                 </a:solidFill>
                 <a:latin typeface="Lexend"/>
               </a:rPr>
-              <a:t>A 2-m post casts a 1.5-m shadow. At the same moment,</a:t>
+              <a:t>Ana's eyes are 4 ft up, 1.5 ft from a mirror on the ground.</a:t>
             </a:r>
           </a:p>
         </p:txBody>
@@ -5136,7 +5147,42 @@
                 </a:solidFill>
                 <a:latin typeface="Lexend"/>
               </a:rPr>
-              <a:t>a building casts a 12-m shadow. How tall is the building?</a:t>
+              <a:t>In it she sees the top of a flagpole 12 ft beyond the mirror.</a:t>
+            </a:r>
+          </a:p>
+        </p:txBody>
+      </p:sp>
+      <p:sp>
+        <p:nvSpPr>
+          <p:cNvPr id="10" name="TextBox 9"/>
+          <p:cNvSpPr txBox="1"/>
+          <p:nvPr/>
+        </p:nvSpPr>
+        <p:spPr>
+          <a:xfrm>
+            <a:off x="777240" y="2678396"/>
+            <a:ext cx="10607040" cy="429370"/>
+          </a:xfrm>
+          <a:prstGeom prst="rect">
+            <a:avLst/>
+          </a:prstGeom>
+          <a:noFill/>
+        </p:spPr>
+        <p:txBody>
+          <a:bodyPr wrap="square" lIns="45720" rIns="45720" tIns="18288" bIns="18288" anchor="t">
+            <a:spAutoFit/>
+          </a:bodyPr>
+          <a:lstStyle/>
+          <a:p>
+            <a:pPr algn="ctr"/>
+            <a:r>
+              <a:rPr sz="2280" b="0" i="0">
+                <a:solidFill>
+                  <a:srgbClr val="1A1A1A"/>
+                </a:solidFill>
+                <a:latin typeface="Lexend"/>
+              </a:rPr>
+              <a:t>The two right triangles are similar. How tall is the flagpole?</a:t>
             </a:r>
           </a:p>
         </p:txBody>
@@ -5399,7 +5445,7 @@
                 </a:solidFill>
                 <a:latin typeface="Lexend"/>
               </a:rPr>
-              <a:t>A 2-m post casts a 1.5-m shadow. At the same moment,</a:t>
+              <a:t>Ana's eyes are 4 ft up, 1.5 ft from a mirror on the ground.</a:t>
             </a:r>
           </a:p>
         </p:txBody>
@@ -5434,14 +5480,49 @@
                 </a:solidFill>
                 <a:latin typeface="Lexend"/>
               </a:rPr>
-              <a:t>a building casts a 12-m shadow. How tall is the building?</a:t>
+              <a:t>In it she sees the top of a flagpole 12 ft beyond the mirror.</a:t>
+            </a:r>
+          </a:p>
+        </p:txBody>
+      </p:sp>
+      <p:sp>
+        <p:nvSpPr>
+          <p:cNvPr id="10" name="TextBox 9"/>
+          <p:cNvSpPr txBox="1"/>
+          <p:nvPr/>
+        </p:nvSpPr>
+        <p:spPr>
+          <a:xfrm>
+            <a:off x="777240" y="2678396"/>
+            <a:ext cx="10607040" cy="429370"/>
+          </a:xfrm>
+          <a:prstGeom prst="rect">
+            <a:avLst/>
+          </a:prstGeom>
+          <a:noFill/>
+        </p:spPr>
+        <p:txBody>
+          <a:bodyPr wrap="square" lIns="45720" rIns="45720" tIns="18288" bIns="18288" anchor="t">
+            <a:spAutoFit/>
+          </a:bodyPr>
+          <a:lstStyle/>
+          <a:p>
+            <a:pPr algn="ctr"/>
+            <a:r>
+              <a:rPr sz="2280" b="0" i="0">
+                <a:solidFill>
+                  <a:srgbClr val="1A1A1A"/>
+                </a:solidFill>
+                <a:latin typeface="Lexend"/>
+              </a:rPr>
+              <a:t>The two right triangles are similar. How tall is the flagpole?</a:t>
             </a:r>
           </a:p>
         </p:txBody>
       </p:sp>
       <p:pic>
         <p:nvPicPr>
-          <p:cNvPr id="10" name="Picture 9" descr="06184dcef0298bd6.png"/>
+          <p:cNvPr id="11" name="Picture 10" descr="06184dcef0298bd6.png"/>
           <p:cNvPicPr>
             <a:picLocks noChangeAspect="1"/>
           </p:cNvPicPr>
@@ -5455,7 +5536,7 @@
         </p:blipFill>
         <p:spPr>
           <a:xfrm>
-            <a:off x="5192267" y="2751548"/>
+            <a:off x="5175503" y="3290647"/>
             <a:ext cx="1511808" cy="609600"/>
           </a:xfrm>
           <a:prstGeom prst="rect">
@@ -5465,7 +5546,7 @@
       </p:pic>
       <p:pic>
         <p:nvPicPr>
-          <p:cNvPr id="11" name="Picture 10" descr="b9b66c1a26ec4326.png"/>
+          <p:cNvPr id="12" name="Picture 11" descr="be1f699f2cd419ac.png"/>
           <p:cNvPicPr>
             <a:picLocks noChangeAspect="1"/>
           </p:cNvPicPr>
@@ -5479,8 +5560,8 @@
         </p:blipFill>
         <p:spPr>
           <a:xfrm>
-            <a:off x="5192267" y="3573937"/>
-            <a:ext cx="1889760" cy="262128"/>
+            <a:off x="5175503" y="4113035"/>
+            <a:ext cx="1926335" cy="265176"/>
           </a:xfrm>
           <a:prstGeom prst="rect">
             <a:avLst/>
@@ -5489,13 +5570,13 @@
       </p:pic>
       <p:sp>
         <p:nvSpPr>
-          <p:cNvPr id="12" name="TextBox 11"/>
-          <p:cNvSpPr txBox="1"/>
-          <p:nvPr/>
-        </p:nvSpPr>
-        <p:spPr>
-          <a:xfrm>
-            <a:off x="777240" y="4572000"/>
+          <p:cNvPr id="13" name="TextBox 12"/>
+          <p:cNvSpPr txBox="1"/>
+          <p:nvPr/>
+        </p:nvSpPr>
+        <p:spPr>
+          <a:xfrm>
+            <a:off x="777240" y="4576903"/>
             <a:ext cx="10607040" cy="548640"/>
           </a:xfrm>
           <a:prstGeom prst="rect">
@@ -5517,7 +5598,7 @@
                 </a:solidFill>
                 <a:latin typeface="Lexend"/>
               </a:rPr>
-              <a:t>Answer:   16 m</a:t>
+              <a:t>Answer:   32 ft</a:t>
             </a:r>
           </a:p>
         </p:txBody>
@@ -6553,7 +6634,7 @@
                 </a:solidFill>
                 <a:latin typeface="Lexend"/>
               </a:rPr>
-              <a:t>A triangle has sides 6 cm, 8 cm and 11 cm.</a:t>
+              <a:t>The two triangles are similar.</a:t>
             </a:r>
           </a:p>
         </p:txBody>
@@ -6582,52 +6663,41 @@
           <a:p>
             <a:pPr algn="l"/>
             <a:r>
-              <a:rPr sz="2280" b="0" i="0">
+              <a:rPr sz="2280" b="1" i="0">
                 <a:solidFill>
                   <a:srgbClr val="1A1A1A"/>
                 </a:solidFill>
                 <a:latin typeface="Lexend"/>
               </a:rPr>
-              <a:t>A similar triangle's shortest side is 18 cm.</a:t>
-            </a:r>
-          </a:p>
-        </p:txBody>
-      </p:sp>
-      <p:sp>
-        <p:nvSpPr>
-          <p:cNvPr id="10" name="TextBox 9"/>
-          <p:cNvSpPr txBox="1"/>
-          <p:nvPr/>
-        </p:nvSpPr>
-        <p:spPr>
-          <a:xfrm>
-            <a:off x="1234440" y="2952716"/>
-            <a:ext cx="10058400" cy="429370"/>
-          </a:xfrm>
-          <a:prstGeom prst="rect">
-            <a:avLst/>
-          </a:prstGeom>
-          <a:noFill/>
-        </p:spPr>
-        <p:txBody>
-          <a:bodyPr wrap="square" lIns="45720" rIns="45720" tIns="18288" bIns="18288" anchor="t">
-            <a:spAutoFit/>
-          </a:bodyPr>
-          <a:lstStyle/>
-          <a:p>
-            <a:pPr algn="l"/>
-            <a:r>
-              <a:rPr sz="2280" b="1" i="0">
-                <a:solidFill>
-                  <a:srgbClr val="1A1A1A"/>
-                </a:solidFill>
-                <a:latin typeface="Lexend"/>
-              </a:rPr>
-              <a:t>Find its other two sides.</a:t>
-            </a:r>
-          </a:p>
-        </p:txBody>
-      </p:sp>
+              <a:t>Find x.</a:t>
+            </a:r>
+          </a:p>
+        </p:txBody>
+      </p:sp>
+      <p:pic>
+        <p:nvPicPr>
+          <p:cNvPr id="10" name="Picture 9" descr="g4645b571df500e1b.png"/>
+          <p:cNvPicPr>
+            <a:picLocks noChangeAspect="1"/>
+          </p:cNvPicPr>
+          <p:nvPr/>
+        </p:nvPicPr>
+        <p:blipFill>
+          <a:blip r:embed="rId2"/>
+          <a:stretch>
+            <a:fillRect/>
+          </a:stretch>
+        </p:blipFill>
+        <p:spPr>
+          <a:xfrm>
+            <a:off x="2880360" y="2998436"/>
+            <a:ext cx="6400800" cy="1724847"/>
+          </a:xfrm>
+          <a:prstGeom prst="rect">
+            <a:avLst/>
+          </a:prstGeom>
+        </p:spPr>
+      </p:pic>
       <p:sp>
         <p:nvSpPr>
           <p:cNvPr id="11" name="TextBox 10"/>
@@ -6636,7 +6706,7 @@
         </p:nvSpPr>
         <p:spPr>
           <a:xfrm>
-            <a:off x="777240" y="4343400"/>
+            <a:off x="777240" y="5006748"/>
             <a:ext cx="10607040" cy="457200"/>
           </a:xfrm>
           <a:prstGeom prst="rect">
@@ -6921,7 +6991,7 @@
                 </a:solidFill>
                 <a:latin typeface="Lexend"/>
               </a:rPr>
-              <a:t>A triangle has sides 6 cm, 8 cm and 11 cm.</a:t>
+              <a:t>The two triangles are similar.</a:t>
             </a:r>
           </a:p>
         </p:txBody>
@@ -6950,55 +7020,20 @@
           <a:p>
             <a:pPr algn="l"/>
             <a:r>
-              <a:rPr sz="2280" b="0" i="0">
+              <a:rPr sz="2280" b="1" i="0">
                 <a:solidFill>
                   <a:srgbClr val="1A1A1A"/>
                 </a:solidFill>
                 <a:latin typeface="Lexend"/>
               </a:rPr>
-              <a:t>A similar triangle's shortest side is 18 cm.</a:t>
-            </a:r>
-          </a:p>
-        </p:txBody>
-      </p:sp>
-      <p:sp>
-        <p:nvSpPr>
-          <p:cNvPr id="10" name="TextBox 9"/>
-          <p:cNvSpPr txBox="1"/>
-          <p:nvPr/>
-        </p:nvSpPr>
-        <p:spPr>
-          <a:xfrm>
-            <a:off x="1234440" y="2952716"/>
-            <a:ext cx="10058400" cy="429370"/>
-          </a:xfrm>
-          <a:prstGeom prst="rect">
-            <a:avLst/>
-          </a:prstGeom>
-          <a:noFill/>
-        </p:spPr>
-        <p:txBody>
-          <a:bodyPr wrap="square" lIns="45720" rIns="45720" tIns="18288" bIns="18288" anchor="t">
-            <a:spAutoFit/>
-          </a:bodyPr>
-          <a:lstStyle/>
-          <a:p>
-            <a:pPr algn="l"/>
-            <a:r>
-              <a:rPr sz="2280" b="1" i="0">
-                <a:solidFill>
-                  <a:srgbClr val="1A1A1A"/>
-                </a:solidFill>
-                <a:latin typeface="Lexend"/>
-              </a:rPr>
-              <a:t>Find its other two sides.</a:t>
+              <a:t>Find x.</a:t>
             </a:r>
           </a:p>
         </p:txBody>
       </p:sp>
       <p:pic>
         <p:nvPicPr>
-          <p:cNvPr id="11" name="Picture 10" descr="53eec5d611581b7a.png"/>
+          <p:cNvPr id="10" name="Picture 9" descr="ge16b055d26223f4b.png"/>
           <p:cNvPicPr>
             <a:picLocks noChangeAspect="1"/>
           </p:cNvPicPr>
@@ -7012,17 +7047,52 @@
         </p:blipFill>
         <p:spPr>
           <a:xfrm>
-            <a:off x="4453571" y="3610687"/>
-            <a:ext cx="1423416" cy="609600"/>
+            <a:off x="1122000" y="3048327"/>
+            <a:ext cx="4754880" cy="1418122"/>
           </a:xfrm>
           <a:prstGeom prst="rect">
             <a:avLst/>
           </a:prstGeom>
         </p:spPr>
       </p:pic>
+      <p:sp>
+        <p:nvSpPr>
+          <p:cNvPr id="11" name="TextBox 10"/>
+          <p:cNvSpPr txBox="1"/>
+          <p:nvPr/>
+        </p:nvSpPr>
+        <p:spPr>
+          <a:xfrm>
+            <a:off x="6608400" y="2975576"/>
+            <a:ext cx="4568279" cy="457200"/>
+          </a:xfrm>
+          <a:prstGeom prst="rect">
+            <a:avLst/>
+          </a:prstGeom>
+          <a:noFill/>
+        </p:spPr>
+        <p:txBody>
+          <a:bodyPr wrap="none" lIns="45720" rIns="45720" tIns="18288" bIns="18288" anchor="ctr">
+            <a:noAutofit/>
+          </a:bodyPr>
+          <a:lstStyle/>
+          <a:p>
+            <a:pPr algn="l"/>
+            <a:r>
+              <a:rPr sz="2330" b="0" i="0">
+                <a:solidFill>
+                  <a:srgbClr val="1A1A1A"/>
+                </a:solidFill>
+                <a:latin typeface="Lexend"/>
+              </a:rPr>
+              <a:t>sorted:  6, 8, 11  and  18, x, 33</a:t>
+            </a:r>
+          </a:p>
+        </p:txBody>
+      </p:sp>
       <p:pic>
         <p:nvPicPr>
-          <p:cNvPr id="12" name="Picture 11" descr="2bce47045ed4cc05.png"/>
+          <p:cNvPr id="12" name="Picture 11" descr="6ad28beba7d2ff38.png"/>
           <p:cNvPicPr>
             <a:picLocks noChangeAspect="1"/>
           </p:cNvPicPr>
@@ -7036,52 +7106,17 @@
         </p:blipFill>
         <p:spPr>
           <a:xfrm>
-            <a:off x="4453571" y="4445267"/>
-            <a:ext cx="1389888" cy="252984"/>
+            <a:off x="6663264" y="3501356"/>
+            <a:ext cx="1203960" cy="515112"/>
           </a:xfrm>
           <a:prstGeom prst="rect">
             <a:avLst/>
           </a:prstGeom>
         </p:spPr>
       </p:pic>
-      <p:sp>
-        <p:nvSpPr>
-          <p:cNvPr id="13" name="TextBox 12"/>
-          <p:cNvSpPr txBox="1"/>
-          <p:nvPr/>
-        </p:nvSpPr>
-        <p:spPr>
-          <a:xfrm>
-            <a:off x="5843459" y="4325443"/>
-            <a:ext cx="620905" cy="457200"/>
-          </a:xfrm>
-          <a:prstGeom prst="rect">
-            <a:avLst/>
-          </a:prstGeom>
-          <a:noFill/>
-        </p:spPr>
-        <p:txBody>
-          <a:bodyPr wrap="none" lIns="45720" rIns="45720" tIns="18288" bIns="18288" anchor="ctr">
-            <a:noAutofit/>
-          </a:bodyPr>
-          <a:lstStyle/>
-          <a:p>
-            <a:pPr algn="l"/>
-            <a:r>
-              <a:rPr sz="2750" b="0" i="0">
-                <a:solidFill>
-                  <a:srgbClr val="1A1A1A"/>
-                </a:solidFill>
-                <a:latin typeface="Lexend"/>
-              </a:rPr>
-              <a:t>,   </a:t>
-            </a:r>
-          </a:p>
-        </p:txBody>
-      </p:sp>
       <p:pic>
         <p:nvPicPr>
-          <p:cNvPr id="14" name="Picture 13" descr="ec052705d97f00fd.png"/>
+          <p:cNvPr id="13" name="Picture 12" descr="10e0b58bf3f66f8b.png"/>
           <p:cNvPicPr>
             <a:picLocks noChangeAspect="1"/>
           </p:cNvPicPr>
@@ -7095,8 +7130,8 @@
         </p:blipFill>
         <p:spPr>
           <a:xfrm>
-            <a:off x="6327204" y="4445267"/>
-            <a:ext cx="1487424" cy="252984"/>
+            <a:off x="6663264" y="4220018"/>
+            <a:ext cx="1633728" cy="213360"/>
           </a:xfrm>
           <a:prstGeom prst="rect">
             <a:avLst/>
@@ -7105,13 +7140,13 @@
       </p:pic>
       <p:sp>
         <p:nvSpPr>
-          <p:cNvPr id="15" name="TextBox 14"/>
-          <p:cNvSpPr txBox="1"/>
-          <p:nvPr/>
-        </p:nvSpPr>
-        <p:spPr>
-          <a:xfrm>
-            <a:off x="777240" y="4896943"/>
+          <p:cNvPr id="14" name="TextBox 13"/>
+          <p:cNvSpPr txBox="1"/>
+          <p:nvPr/>
+        </p:nvSpPr>
+        <p:spPr>
+          <a:xfrm>
+            <a:off x="777240" y="4799804"/>
             <a:ext cx="10607040" cy="548640"/>
           </a:xfrm>
           <a:prstGeom prst="rect">
@@ -7133,7 +7168,7 @@
                 </a:solidFill>
                 <a:latin typeface="Lexend"/>
               </a:rPr>
-              <a:t>Answer:   24 cm and 33 cm</a:t>
+              <a:t>Answer:   x = 24</a:t>
             </a:r>
           </a:p>
         </p:txBody>
@@ -7941,7 +7976,7 @@
                 </a:solidFill>
                 <a:latin typeface="Lexend"/>
               </a:rPr>
-              <a:t>A triangle has sides 12 in, 16 in and 20 in.</a:t>
+              <a:t>A triangle has sides of 12, 16 and 20 inches.</a:t>
             </a:r>
           </a:p>
         </p:txBody>
@@ -7976,7 +8011,7 @@
                 </a:solidFill>
                 <a:latin typeface="Lexend"/>
               </a:rPr>
-              <a:t>A similar triangle's longest side is 5 in.</a:t>
+              <a:t>A similar triangle's longest side is 5 inches.</a:t>
             </a:r>
           </a:p>
         </p:txBody>
@@ -8309,7 +8344,7 @@
                 </a:solidFill>
                 <a:latin typeface="Lexend"/>
               </a:rPr>
-              <a:t>A triangle has sides 12 in, 16 in and 20 in.</a:t>
+              <a:t>A triangle has sides of 12, 16 and 20 inches.</a:t>
             </a:r>
           </a:p>
         </p:txBody>
@@ -8344,7 +8379,7 @@
                 </a:solidFill>
                 <a:latin typeface="Lexend"/>
               </a:rPr>
-              <a:t>A similar triangle's longest side is 5 in.</a:t>
+              <a:t>A similar triangle's longest side is 5 inches.</a:t>
             </a:r>
           </a:p>
         </p:txBody>
@@ -8521,7 +8556,7 @@
                 </a:solidFill>
                 <a:latin typeface="Lexend"/>
               </a:rPr>
-              <a:t>Answer:   3 in and 4 in</a:t>
+              <a:t>Answer:   3 inches and 4 inches</a:t>
             </a:r>
           </a:p>
         </p:txBody>
@@ -8984,7 +9019,7 @@
                 </a:solidFill>
                 <a:latin typeface="Lexend"/>
               </a:rPr>
-              <a:t>9</a:t>
+              <a:t>none of them</a:t>
             </a:r>
           </a:p>
         </p:txBody>
@@ -12867,14 +12902,14 @@
                 </a:solidFill>
                 <a:latin typeface="Lexend"/>
               </a:rPr>
-              <a:t>The triangles are similar. How tall is the flagpole?</a:t>
+              <a:t>The two right triangles are similar. How tall is the flagpole?</a:t>
             </a:r>
           </a:p>
         </p:txBody>
       </p:sp>
       <p:pic>
         <p:nvPicPr>
-          <p:cNvPr id="10" name="Picture 9" descr="g7a629c5391333488.png"/>
+          <p:cNvPr id="10" name="Picture 9" descr="g0645dd5acbb2e279.png"/>
           <p:cNvPicPr>
             <a:picLocks noChangeAspect="1"/>
           </p:cNvPicPr>
@@ -12888,8 +12923,8 @@
         </p:blipFill>
         <p:spPr>
           <a:xfrm>
-            <a:off x="5088851" y="3427807"/>
-            <a:ext cx="1983817" cy="1924285"/>
+            <a:off x="5091272" y="3427807"/>
+            <a:ext cx="1978974" cy="1922533"/>
           </a:xfrm>
           <a:prstGeom prst="rect">
             <a:avLst/>
@@ -12904,7 +12939,7 @@
         </p:nvSpPr>
         <p:spPr>
           <a:xfrm>
-            <a:off x="777240" y="5635556"/>
+            <a:off x="777240" y="5633804"/>
             <a:ext cx="10607040" cy="457200"/>
           </a:xfrm>
           <a:prstGeom prst="rect">
@@ -13224,14 +13259,14 @@
                 </a:solidFill>
                 <a:latin typeface="Lexend"/>
               </a:rPr>
-              <a:t>The triangles are similar. How tall is the flagpole?</a:t>
+              <a:t>The two right triangles are similar. How tall is the flagpole?</a:t>
             </a:r>
           </a:p>
         </p:txBody>
       </p:sp>
       <p:pic>
         <p:nvPicPr>
-          <p:cNvPr id="10" name="Picture 9" descr="g7a629c5391333488.png"/>
+          <p:cNvPr id="10" name="Picture 9" descr="g0645dd5acbb2e279.png"/>
           <p:cNvPicPr>
             <a:picLocks noChangeAspect="1"/>
           </p:cNvPicPr>
@@ -13245,8 +13280,8 @@
         </p:blipFill>
         <p:spPr>
           <a:xfrm>
-            <a:off x="3903179" y="3427807"/>
-            <a:ext cx="1983817" cy="1924285"/>
+            <a:off x="3905600" y="3427807"/>
+            <a:ext cx="1978974" cy="1922533"/>
           </a:xfrm>
           <a:prstGeom prst="rect">
             <a:avLst/>
@@ -13269,7 +13304,7 @@
         </p:blipFill>
         <p:spPr>
           <a:xfrm>
-            <a:off x="6673380" y="3883982"/>
+            <a:off x="6670959" y="3883105"/>
             <a:ext cx="1225296" cy="509016"/>
           </a:xfrm>
           <a:prstGeom prst="rect">
@@ -13293,7 +13328,7 @@
         </p:blipFill>
         <p:spPr>
           <a:xfrm>
-            <a:off x="6673380" y="4587403"/>
+            <a:off x="6670959" y="4586527"/>
             <a:ext cx="1642872" cy="222504"/>
           </a:xfrm>
           <a:prstGeom prst="rect">
@@ -13309,7 +13344,7 @@
         </p:nvSpPr>
         <p:spPr>
           <a:xfrm>
-            <a:off x="777240" y="5635556"/>
+            <a:off x="777240" y="5633804"/>
             <a:ext cx="10607040" cy="548640"/>
           </a:xfrm>
           <a:prstGeom prst="rect">
@@ -14501,7 +14536,7 @@
           <a:p>
             <a:pPr algn="l"/>
             <a:r>
-              <a:rPr sz="1610" b="1" i="0">
+              <a:rPr sz="1520" b="1" i="0">
                 <a:solidFill>
                   <a:srgbClr val="0B5394"/>
                 </a:solidFill>
@@ -14536,7 +14571,7 @@
           <a:p>
             <a:pPr algn="l"/>
             <a:r>
-              <a:rPr sz="1610" b="0" i="0">
+              <a:rPr sz="1520" b="0" i="0">
                 <a:solidFill>
                   <a:srgbClr val="1A1A1A"/>
                 </a:solidFill>
@@ -14555,7 +14590,7 @@
         </p:nvSpPr>
         <p:spPr>
           <a:xfrm>
-            <a:off x="960120" y="2039112"/>
+            <a:off x="960120" y="2029967"/>
             <a:ext cx="548640" cy="356616"/>
           </a:xfrm>
           <a:prstGeom prst="rect">
@@ -14571,7 +14606,7 @@
           <a:p>
             <a:pPr algn="l"/>
             <a:r>
-              <a:rPr sz="1610" b="1" i="0">
+              <a:rPr sz="1520" b="1" i="0">
                 <a:solidFill>
                   <a:srgbClr val="0B5394"/>
                 </a:solidFill>
@@ -14590,7 +14625,77 @@
         </p:nvSpPr>
         <p:spPr>
           <a:xfrm>
-            <a:off x="1554480" y="2039112"/>
+            <a:off x="1554480" y="2029967"/>
+            <a:ext cx="9829800" cy="411480"/>
+          </a:xfrm>
+          <a:prstGeom prst="rect">
+            <a:avLst/>
+          </a:prstGeom>
+          <a:noFill/>
+        </p:spPr>
+        <p:txBody>
+          <a:bodyPr wrap="square" lIns="45720" rIns="45720" tIns="18288" bIns="18288" anchor="t">
+            <a:spAutoFit/>
+          </a:bodyPr>
+          <a:lstStyle/>
+          <a:p>
+            <a:pPr algn="l"/>
+            <a:r>
+              <a:rPr sz="1520" b="0" i="0">
+                <a:solidFill>
+                  <a:srgbClr val="1A1A1A"/>
+                </a:solidFill>
+                <a:latin typeface="Lexend"/>
+              </a:rPr>
+              <a:t>A triangle has sides 8, 10 and 13. A similar triangle's 10-side is 25. Find its other two sides.</a:t>
+            </a:r>
+          </a:p>
+        </p:txBody>
+      </p:sp>
+      <p:sp>
+        <p:nvSpPr>
+          <p:cNvPr id="12" name="TextBox 11"/>
+          <p:cNvSpPr txBox="1"/>
+          <p:nvPr/>
+        </p:nvSpPr>
+        <p:spPr>
+          <a:xfrm>
+            <a:off x="960120" y="2487168"/>
+            <a:ext cx="548640" cy="356616"/>
+          </a:xfrm>
+          <a:prstGeom prst="rect">
+            <a:avLst/>
+          </a:prstGeom>
+          <a:noFill/>
+        </p:spPr>
+        <p:txBody>
+          <a:bodyPr wrap="square" lIns="45720" rIns="45720" tIns="18288" bIns="18288" anchor="t">
+            <a:spAutoFit/>
+          </a:bodyPr>
+          <a:lstStyle/>
+          <a:p>
+            <a:pPr algn="l"/>
+            <a:r>
+              <a:rPr sz="1520" b="1" i="0">
+                <a:solidFill>
+                  <a:srgbClr val="0B5394"/>
+                </a:solidFill>
+                <a:latin typeface="Lexend"/>
+              </a:rPr>
+              <a:t>3.</a:t>
+            </a:r>
+          </a:p>
+        </p:txBody>
+      </p:sp>
+      <p:sp>
+        <p:nvSpPr>
+          <p:cNvPr id="13" name="TextBox 12"/>
+          <p:cNvSpPr txBox="1"/>
+          <p:nvPr/>
+        </p:nvSpPr>
+        <p:spPr>
+          <a:xfrm>
+            <a:off x="1554480" y="2487168"/>
             <a:ext cx="9829800" cy="768096"/>
           </a:xfrm>
           <a:prstGeom prst="rect">
@@ -14606,26 +14711,26 @@
           <a:p>
             <a:pPr algn="l"/>
             <a:r>
-              <a:rPr sz="1610" b="0" i="0">
+              <a:rPr sz="1520" b="0" i="0">
                 <a:solidFill>
                   <a:srgbClr val="1A1A1A"/>
                 </a:solidFill>
                 <a:latin typeface="Lexend"/>
               </a:rPr>
-              <a:t>A triangle has sides 8, 10 and 13. A similar triangle's 10-side is 25. Find its other two sides.</a:t>
-            </a:r>
-          </a:p>
-        </p:txBody>
-      </p:sp>
-      <p:sp>
-        <p:nvSpPr>
-          <p:cNvPr id="12" name="TextBox 11"/>
-          <p:cNvSpPr txBox="1"/>
-          <p:nvPr/>
-        </p:nvSpPr>
-        <p:spPr>
-          <a:xfrm>
-            <a:off x="960120" y="2862072"/>
+              <a:t>A triangle has sides 15, 25 and 30. A similar triangle's longest side is 6. Find its other two sides.</a:t>
+            </a:r>
+          </a:p>
+        </p:txBody>
+      </p:sp>
+      <p:sp>
+        <p:nvSpPr>
+          <p:cNvPr id="14" name="TextBox 13"/>
+          <p:cNvSpPr txBox="1"/>
+          <p:nvPr/>
+        </p:nvSpPr>
+        <p:spPr>
+          <a:xfrm>
+            <a:off x="960120" y="3300984"/>
             <a:ext cx="548640" cy="356616"/>
           </a:xfrm>
           <a:prstGeom prst="rect">
@@ -14641,26 +14746,26 @@
           <a:p>
             <a:pPr algn="l"/>
             <a:r>
-              <a:rPr sz="1610" b="1" i="0">
+              <a:rPr sz="1520" b="1" i="0">
                 <a:solidFill>
                   <a:srgbClr val="0B5394"/>
                 </a:solidFill>
                 <a:latin typeface="Lexend"/>
               </a:rPr>
-              <a:t>3.</a:t>
-            </a:r>
-          </a:p>
-        </p:txBody>
-      </p:sp>
-      <p:sp>
-        <p:nvSpPr>
-          <p:cNvPr id="13" name="TextBox 12"/>
-          <p:cNvSpPr txBox="1"/>
-          <p:nvPr/>
-        </p:nvSpPr>
-        <p:spPr>
-          <a:xfrm>
-            <a:off x="1554480" y="2862072"/>
+              <a:t>4.</a:t>
+            </a:r>
+          </a:p>
+        </p:txBody>
+      </p:sp>
+      <p:sp>
+        <p:nvSpPr>
+          <p:cNvPr id="15" name="TextBox 14"/>
+          <p:cNvSpPr txBox="1"/>
+          <p:nvPr/>
+        </p:nvSpPr>
+        <p:spPr>
+          <a:xfrm>
+            <a:off x="1554480" y="3300984"/>
             <a:ext cx="9829800" cy="768096"/>
           </a:xfrm>
           <a:prstGeom prst="rect">
@@ -14676,26 +14781,26 @@
           <a:p>
             <a:pPr algn="l"/>
             <a:r>
-              <a:rPr sz="1610" b="0" i="0">
+              <a:rPr sz="1520" b="0" i="0">
                 <a:solidFill>
                   <a:srgbClr val="1A1A1A"/>
                 </a:solidFill>
                 <a:latin typeface="Lexend"/>
               </a:rPr>
-              <a:t>A triangle has sides 15, 25 and 30. A similar triangle's longest side is 6. Find its other two sides.</a:t>
-            </a:r>
-          </a:p>
-        </p:txBody>
-      </p:sp>
-      <p:sp>
-        <p:nvSpPr>
-          <p:cNvPr id="14" name="TextBox 13"/>
-          <p:cNvSpPr txBox="1"/>
-          <p:nvPr/>
-        </p:nvSpPr>
-        <p:spPr>
-          <a:xfrm>
-            <a:off x="960120" y="3685032"/>
+              <a:t>A 1.5-m child casts a 2-m shadow. At the same moment a tree casts a 14-m shadow. How tall is the tree?</a:t>
+            </a:r>
+          </a:p>
+        </p:txBody>
+      </p:sp>
+      <p:sp>
+        <p:nvSpPr>
+          <p:cNvPr id="16" name="TextBox 15"/>
+          <p:cNvSpPr txBox="1"/>
+          <p:nvPr/>
+        </p:nvSpPr>
+        <p:spPr>
+          <a:xfrm>
+            <a:off x="960120" y="4114800"/>
             <a:ext cx="548640" cy="356616"/>
           </a:xfrm>
           <a:prstGeom prst="rect">
@@ -14711,26 +14816,26 @@
           <a:p>
             <a:pPr algn="l"/>
             <a:r>
-              <a:rPr sz="1610" b="1" i="0">
+              <a:rPr sz="1520" b="1" i="0">
                 <a:solidFill>
                   <a:srgbClr val="0B5394"/>
                 </a:solidFill>
                 <a:latin typeface="Lexend"/>
               </a:rPr>
-              <a:t>4.</a:t>
-            </a:r>
-          </a:p>
-        </p:txBody>
-      </p:sp>
-      <p:sp>
-        <p:nvSpPr>
-          <p:cNvPr id="15" name="TextBox 14"/>
-          <p:cNvSpPr txBox="1"/>
-          <p:nvPr/>
-        </p:nvSpPr>
-        <p:spPr>
-          <a:xfrm>
-            <a:off x="1554480" y="3685032"/>
+              <a:t>5.</a:t>
+            </a:r>
+          </a:p>
+        </p:txBody>
+      </p:sp>
+      <p:sp>
+        <p:nvSpPr>
+          <p:cNvPr id="17" name="TextBox 16"/>
+          <p:cNvSpPr txBox="1"/>
+          <p:nvPr/>
+        </p:nvSpPr>
+        <p:spPr>
+          <a:xfrm>
+            <a:off x="1554480" y="4114800"/>
             <a:ext cx="9829800" cy="768096"/>
           </a:xfrm>
           <a:prstGeom prst="rect">
@@ -14746,26 +14851,26 @@
           <a:p>
             <a:pPr algn="l"/>
             <a:r>
-              <a:rPr sz="1610" b="0" i="0">
+              <a:rPr sz="1520" b="0" i="0">
                 <a:solidFill>
                   <a:srgbClr val="1A1A1A"/>
                 </a:solidFill>
                 <a:latin typeface="Lexend"/>
               </a:rPr>
-              <a:t>A 1.5-m child casts a 2-m shadow. At the same moment a tree casts a 14-m shadow. How tall is the tree?</a:t>
-            </a:r>
-          </a:p>
-        </p:txBody>
-      </p:sp>
-      <p:sp>
-        <p:nvSpPr>
-          <p:cNvPr id="16" name="TextBox 15"/>
-          <p:cNvSpPr txBox="1"/>
-          <p:nvPr/>
-        </p:nvSpPr>
-        <p:spPr>
-          <a:xfrm>
-            <a:off x="960120" y="4507992"/>
+              <a:t>The two right triangles are similar and share corner A. The small one runs 3 m along the ground from A and stands 1.2 m high. The big one runs 12 m along the ground from A. How high is it?</a:t>
+            </a:r>
+          </a:p>
+        </p:txBody>
+      </p:sp>
+      <p:sp>
+        <p:nvSpPr>
+          <p:cNvPr id="18" name="TextBox 17"/>
+          <p:cNvSpPr txBox="1"/>
+          <p:nvPr/>
+        </p:nvSpPr>
+        <p:spPr>
+          <a:xfrm>
+            <a:off x="960120" y="4928616"/>
             <a:ext cx="548640" cy="356616"/>
           </a:xfrm>
           <a:prstGeom prst="rect">
@@ -14781,26 +14886,26 @@
           <a:p>
             <a:pPr algn="l"/>
             <a:r>
-              <a:rPr sz="1610" b="1" i="0">
+              <a:rPr sz="1520" b="1" i="0">
                 <a:solidFill>
                   <a:srgbClr val="0B5394"/>
                 </a:solidFill>
                 <a:latin typeface="Lexend"/>
               </a:rPr>
-              <a:t>5.</a:t>
-            </a:r>
-          </a:p>
-        </p:txBody>
-      </p:sp>
-      <p:sp>
-        <p:nvSpPr>
-          <p:cNvPr id="17" name="TextBox 16"/>
-          <p:cNvSpPr txBox="1"/>
-          <p:nvPr/>
-        </p:nvSpPr>
-        <p:spPr>
-          <a:xfrm>
-            <a:off x="1554480" y="4507992"/>
+              <a:t>6.</a:t>
+            </a:r>
+          </a:p>
+        </p:txBody>
+      </p:sp>
+      <p:sp>
+        <p:nvSpPr>
+          <p:cNvPr id="19" name="TextBox 18"/>
+          <p:cNvSpPr txBox="1"/>
+          <p:nvPr/>
+        </p:nvSpPr>
+        <p:spPr>
+          <a:xfrm>
+            <a:off x="1554480" y="4928616"/>
             <a:ext cx="9829800" cy="768096"/>
           </a:xfrm>
           <a:prstGeom prst="rect">
@@ -14816,77 +14921,7 @@
           <a:p>
             <a:pPr algn="l"/>
             <a:r>
-              <a:rPr sz="1610" b="0" i="0">
-                <a:solidFill>
-                  <a:srgbClr val="1A1A1A"/>
-                </a:solidFill>
-                <a:latin typeface="Lexend"/>
-              </a:rPr>
-              <a:t>Two similar right triangles share corner A. The small one runs 3 m along the ground and stands 1.2 m high. The big one's upright is 9 m beyond the small one's. How high is it?</a:t>
-            </a:r>
-          </a:p>
-        </p:txBody>
-      </p:sp>
-      <p:sp>
-        <p:nvSpPr>
-          <p:cNvPr id="18" name="TextBox 17"/>
-          <p:cNvSpPr txBox="1"/>
-          <p:nvPr/>
-        </p:nvSpPr>
-        <p:spPr>
-          <a:xfrm>
-            <a:off x="960120" y="5330952"/>
-            <a:ext cx="548640" cy="356616"/>
-          </a:xfrm>
-          <a:prstGeom prst="rect">
-            <a:avLst/>
-          </a:prstGeom>
-          <a:noFill/>
-        </p:spPr>
-        <p:txBody>
-          <a:bodyPr wrap="square" lIns="45720" rIns="45720" tIns="18288" bIns="18288" anchor="t">
-            <a:spAutoFit/>
-          </a:bodyPr>
-          <a:lstStyle/>
-          <a:p>
-            <a:pPr algn="l"/>
-            <a:r>
-              <a:rPr sz="1610" b="1" i="0">
-                <a:solidFill>
-                  <a:srgbClr val="0B5394"/>
-                </a:solidFill>
-                <a:latin typeface="Lexend"/>
-              </a:rPr>
-              <a:t>6.</a:t>
-            </a:r>
-          </a:p>
-        </p:txBody>
-      </p:sp>
-      <p:sp>
-        <p:nvSpPr>
-          <p:cNvPr id="19" name="TextBox 18"/>
-          <p:cNvSpPr txBox="1"/>
-          <p:nvPr/>
-        </p:nvSpPr>
-        <p:spPr>
-          <a:xfrm>
-            <a:off x="1554480" y="5330952"/>
-            <a:ext cx="9829800" cy="768096"/>
-          </a:xfrm>
-          <a:prstGeom prst="rect">
-            <a:avLst/>
-          </a:prstGeom>
-          <a:noFill/>
-        </p:spPr>
-        <p:txBody>
-          <a:bodyPr wrap="square" lIns="45720" rIns="45720" tIns="18288" bIns="18288" anchor="t">
-            <a:spAutoFit/>
-          </a:bodyPr>
-          <a:lstStyle/>
-          <a:p>
-            <a:pPr algn="l"/>
-            <a:r>
-              <a:rPr sz="1610" b="0" i="0">
+              <a:rPr sz="1520" b="0" i="0">
                 <a:solidFill>
                   <a:srgbClr val="1A1A1A"/>
                 </a:solidFill>

--- a/a7/packages/A7 Unit 6 - Relationships in Triangles/Lessons/6.07/A7 6.07 Similar Triangles; Indirect Measurement - Slides.pptx
+++ b/a7/packages/A7 Unit 6 - Relationships in Triangles/Lessons/6.07/A7 6.07 Similar Triangles; Indirect Measurement - Slides.pptx
@@ -6634,7 +6634,7 @@
                 </a:solidFill>
                 <a:latin typeface="Lexend"/>
               </a:rPr>
-              <a:t>The two triangles are similar.</a:t>
+              <a:t>Triangle ABC is similar to triangle DEF.</a:t>
             </a:r>
           </a:p>
         </p:txBody>
@@ -6676,7 +6676,7 @@
       </p:sp>
       <p:pic>
         <p:nvPicPr>
-          <p:cNvPr id="10" name="Picture 9" descr="g4645b571df500e1b.png"/>
+          <p:cNvPr id="10" name="Picture 9" descr="gd74494cbb92b60bb.png"/>
           <p:cNvPicPr>
             <a:picLocks noChangeAspect="1"/>
           </p:cNvPicPr>
@@ -6690,8 +6690,8 @@
         </p:blipFill>
         <p:spPr>
           <a:xfrm>
-            <a:off x="2880360" y="2998436"/>
-            <a:ext cx="6400800" cy="1724847"/>
+            <a:off x="2933189" y="2998436"/>
+            <a:ext cx="6295140" cy="2332515"/>
           </a:xfrm>
           <a:prstGeom prst="rect">
             <a:avLst/>
@@ -6706,7 +6706,7 @@
         </p:nvSpPr>
         <p:spPr>
           <a:xfrm>
-            <a:off x="777240" y="5006748"/>
+            <a:off x="777240" y="5614416"/>
             <a:ext cx="10607040" cy="457200"/>
           </a:xfrm>
           <a:prstGeom prst="rect">
@@ -6991,7 +6991,7 @@
                 </a:solidFill>
                 <a:latin typeface="Lexend"/>
               </a:rPr>
-              <a:t>The two triangles are similar.</a:t>
+              <a:t>Triangle ABC is similar to triangle DEF.</a:t>
             </a:r>
           </a:p>
         </p:txBody>
@@ -7033,7 +7033,7 @@
       </p:sp>
       <p:pic>
         <p:nvPicPr>
-          <p:cNvPr id="10" name="Picture 9" descr="ge16b055d26223f4b.png"/>
+          <p:cNvPr id="10" name="Picture 9" descr="g637064f2a1edf4af.png"/>
           <p:cNvPicPr>
             <a:picLocks noChangeAspect="1"/>
           </p:cNvPicPr>
@@ -7047,8 +7047,8 @@
         </p:blipFill>
         <p:spPr>
           <a:xfrm>
-            <a:off x="1122000" y="3048327"/>
-            <a:ext cx="4754880" cy="1418122"/>
+            <a:off x="777240" y="3133179"/>
+            <a:ext cx="2526982" cy="1248418"/>
           </a:xfrm>
           <a:prstGeom prst="rect">
             <a:avLst/>
@@ -7063,8 +7063,8 @@
         </p:nvSpPr>
         <p:spPr>
           <a:xfrm>
-            <a:off x="6608400" y="2975576"/>
-            <a:ext cx="4568279" cy="457200"/>
+            <a:off x="4035742" y="2975576"/>
+            <a:ext cx="7485697" cy="457200"/>
           </a:xfrm>
           <a:prstGeom prst="rect">
             <a:avLst/>
@@ -7085,7 +7085,7 @@
                 </a:solidFill>
                 <a:latin typeface="Lexend"/>
               </a:rPr>
-              <a:t>sorted:  6, 8, 11  and  18, x, 33</a:t>
+              <a:t>the names:  AC with DF,  BC with EF,  AB with DE</a:t>
             </a:r>
           </a:p>
         </p:txBody>
@@ -7106,7 +7106,7 @@
         </p:blipFill>
         <p:spPr>
           <a:xfrm>
-            <a:off x="6663264" y="3501356"/>
+            <a:off x="4090606" y="3501356"/>
             <a:ext cx="1203960" cy="515112"/>
           </a:xfrm>
           <a:prstGeom prst="rect">
@@ -7130,7 +7130,7 @@
         </p:blipFill>
         <p:spPr>
           <a:xfrm>
-            <a:off x="6663264" y="4220018"/>
+            <a:off x="4090606" y="4220018"/>
             <a:ext cx="1633728" cy="213360"/>
           </a:xfrm>
           <a:prstGeom prst="rect">
@@ -14626,7 +14626,7 @@
         <p:spPr>
           <a:xfrm>
             <a:off x="1554480" y="2029967"/>
-            <a:ext cx="9829800" cy="411480"/>
+            <a:ext cx="9829800" cy="768096"/>
           </a:xfrm>
           <a:prstGeom prst="rect">
             <a:avLst/>
@@ -14647,7 +14647,7 @@
                 </a:solidFill>
                 <a:latin typeface="Lexend"/>
               </a:rPr>
-              <a:t>A triangle has sides 8, 10 and 13. A similar triangle's 10-side is 25. Find its other two sides.</a:t>
+              <a:t>Triangle PQR is similar to triangle XYZ. PQ is 8, QR is 10 and PR is 13, and XY is 20. Find YZ and XZ.</a:t>
             </a:r>
           </a:p>
         </p:txBody>
@@ -14660,7 +14660,7 @@
         </p:nvSpPr>
         <p:spPr>
           <a:xfrm>
-            <a:off x="960120" y="2487168"/>
+            <a:off x="960120" y="2843784"/>
             <a:ext cx="548640" cy="356616"/>
           </a:xfrm>
           <a:prstGeom prst="rect">
@@ -14695,7 +14695,7 @@
         </p:nvSpPr>
         <p:spPr>
           <a:xfrm>
-            <a:off x="1554480" y="2487168"/>
+            <a:off x="1554480" y="2843784"/>
             <a:ext cx="9829800" cy="768096"/>
           </a:xfrm>
           <a:prstGeom prst="rect">
@@ -14730,7 +14730,7 @@
         </p:nvSpPr>
         <p:spPr>
           <a:xfrm>
-            <a:off x="960120" y="3300984"/>
+            <a:off x="960120" y="3657600"/>
             <a:ext cx="548640" cy="356616"/>
           </a:xfrm>
           <a:prstGeom prst="rect">
@@ -14765,7 +14765,7 @@
         </p:nvSpPr>
         <p:spPr>
           <a:xfrm>
-            <a:off x="1554480" y="3300984"/>
+            <a:off x="1554480" y="3657600"/>
             <a:ext cx="9829800" cy="768096"/>
           </a:xfrm>
           <a:prstGeom prst="rect">
@@ -14800,7 +14800,7 @@
         </p:nvSpPr>
         <p:spPr>
           <a:xfrm>
-            <a:off x="960120" y="4114800"/>
+            <a:off x="960120" y="4471416"/>
             <a:ext cx="548640" cy="356616"/>
           </a:xfrm>
           <a:prstGeom prst="rect">
@@ -14835,7 +14835,7 @@
         </p:nvSpPr>
         <p:spPr>
           <a:xfrm>
-            <a:off x="1554480" y="4114800"/>
+            <a:off x="1554480" y="4471416"/>
             <a:ext cx="9829800" cy="768096"/>
           </a:xfrm>
           <a:prstGeom prst="rect">
@@ -14870,7 +14870,7 @@
         </p:nvSpPr>
         <p:spPr>
           <a:xfrm>
-            <a:off x="960120" y="4928616"/>
+            <a:off x="960120" y="5285232"/>
             <a:ext cx="548640" cy="356616"/>
           </a:xfrm>
           <a:prstGeom prst="rect">
@@ -14905,7 +14905,7 @@
         </p:nvSpPr>
         <p:spPr>
           <a:xfrm>
-            <a:off x="1554480" y="4928616"/>
+            <a:off x="1554480" y="5285232"/>
             <a:ext cx="9829800" cy="768096"/>
           </a:xfrm>
           <a:prstGeom prst="rect">
@@ -15365,7 +15365,7 @@
                 </a:solidFill>
                 <a:latin typeface="Lexend"/>
               </a:rPr>
-              <a:t>Every skill listed is required, to a SmartScore of 67. Due at the start of the next class.</a:t>
+              <a:t>Every skill listed is required, to a SmartScore of 67. Due by the Unit 6 test.</a:t>
             </a:r>
           </a:p>
         </p:txBody>
@@ -16817,7 +16817,7 @@
       </p:cxnSp>
       <p:pic>
         <p:nvPicPr>
-          <p:cNvPr id="10" name="Picture 9" descr="gaf1054aa98879b6b.png"/>
+          <p:cNvPr id="10" name="Picture 9" descr="g71bbc6210f7f5f6f.png"/>
           <p:cNvPicPr>
             <a:picLocks noChangeAspect="1"/>
           </p:cNvPicPr>
@@ -16831,8 +16831,8 @@
         </p:blipFill>
         <p:spPr>
           <a:xfrm>
-            <a:off x="2651760" y="1993392"/>
-            <a:ext cx="6858000" cy="2146433"/>
+            <a:off x="3264408" y="1993392"/>
+            <a:ext cx="5632704" cy="1826181"/>
           </a:xfrm>
           <a:prstGeom prst="rect">
             <a:avLst/>
@@ -16841,7 +16841,7 @@
       </p:pic>
       <p:pic>
         <p:nvPicPr>
-          <p:cNvPr id="11" name="Picture 10" descr="4bfdef353fb7e1be.png"/>
+          <p:cNvPr id="11" name="Picture 10" descr="c57688c9329a4b45.png"/>
           <p:cNvPicPr>
             <a:picLocks noChangeAspect="1"/>
           </p:cNvPicPr>
@@ -16855,17 +16855,52 @@
         </p:blipFill>
         <p:spPr>
           <a:xfrm>
-            <a:off x="5135880" y="4286129"/>
-            <a:ext cx="1889760" cy="670560"/>
+            <a:off x="3462866" y="4111038"/>
+            <a:ext cx="2904744" cy="365760"/>
           </a:xfrm>
           <a:prstGeom prst="rect">
             <a:avLst/>
           </a:prstGeom>
         </p:spPr>
       </p:pic>
+      <p:sp>
+        <p:nvSpPr>
+          <p:cNvPr id="12" name="TextBox 11"/>
+          <p:cNvSpPr txBox="1"/>
+          <p:nvPr/>
+        </p:nvSpPr>
+        <p:spPr>
+          <a:xfrm>
+            <a:off x="6367610" y="4072557"/>
+            <a:ext cx="578442" cy="457200"/>
+          </a:xfrm>
+          <a:prstGeom prst="rect">
+            <a:avLst/>
+          </a:prstGeom>
+          <a:noFill/>
+        </p:spPr>
+        <p:txBody>
+          <a:bodyPr wrap="none" lIns="45720" rIns="45720" tIns="18288" bIns="18288" anchor="ctr">
+            <a:noAutofit/>
+          </a:bodyPr>
+          <a:lstStyle/>
+          <a:p>
+            <a:pPr algn="l"/>
+            <a:r>
+              <a:rPr sz="2470" b="0" i="0">
+                <a:solidFill>
+                  <a:srgbClr val="1A1A1A"/>
+                </a:solidFill>
+                <a:latin typeface="Lexend"/>
+              </a:rPr>
+              <a:t>,   </a:t>
+            </a:r>
+          </a:p>
+        </p:txBody>
+      </p:sp>
       <p:pic>
         <p:nvPicPr>
-          <p:cNvPr id="12" name="Picture 11" descr="4d0a8ac6cf842b2e.png"/>
+          <p:cNvPr id="13" name="Picture 12" descr="4bfdef353fb7e1be.png"/>
           <p:cNvPicPr>
             <a:picLocks noChangeAspect="1"/>
           </p:cNvPicPr>
@@ -16879,52 +16914,17 @@
         </p:blipFill>
         <p:spPr>
           <a:xfrm>
-            <a:off x="3319610" y="5286254"/>
-            <a:ext cx="2389632" cy="280416"/>
+            <a:off x="6808893" y="3965877"/>
+            <a:ext cx="1889760" cy="670560"/>
           </a:xfrm>
           <a:prstGeom prst="rect">
             <a:avLst/>
           </a:prstGeom>
         </p:spPr>
       </p:pic>
-      <p:sp>
-        <p:nvSpPr>
-          <p:cNvPr id="13" name="TextBox 12"/>
-          <p:cNvSpPr txBox="1"/>
-          <p:nvPr/>
-        </p:nvSpPr>
-        <p:spPr>
-          <a:xfrm>
-            <a:off x="5709242" y="5208149"/>
-            <a:ext cx="578442" cy="457200"/>
-          </a:xfrm>
-          <a:prstGeom prst="rect">
-            <a:avLst/>
-          </a:prstGeom>
-          <a:noFill/>
-        </p:spPr>
-        <p:txBody>
-          <a:bodyPr wrap="none" lIns="45720" rIns="45720" tIns="18288" bIns="18288" anchor="ctr">
-            <a:noAutofit/>
-          </a:bodyPr>
-          <a:lstStyle/>
-          <a:p>
-            <a:pPr algn="l"/>
-            <a:r>
-              <a:rPr sz="2470" b="0" i="0">
-                <a:solidFill>
-                  <a:srgbClr val="1A1A1A"/>
-                </a:solidFill>
-                <a:latin typeface="Lexend"/>
-              </a:rPr>
-              <a:t>,   </a:t>
-            </a:r>
-          </a:p>
-        </p:txBody>
-      </p:sp>
       <p:pic>
         <p:nvPicPr>
-          <p:cNvPr id="14" name="Picture 13" descr="8a8c7878b0eec089.png"/>
+          <p:cNvPr id="14" name="Picture 13" descr="4d0a8ac6cf842b2e.png"/>
           <p:cNvPicPr>
             <a:picLocks noChangeAspect="1"/>
           </p:cNvPicPr>
@@ -16938,7 +16938,66 @@
         </p:blipFill>
         <p:spPr>
           <a:xfrm>
-            <a:off x="6150525" y="5279777"/>
+            <a:off x="3319610" y="4966002"/>
+            <a:ext cx="2389632" cy="280416"/>
+          </a:xfrm>
+          <a:prstGeom prst="rect">
+            <a:avLst/>
+          </a:prstGeom>
+        </p:spPr>
+      </p:pic>
+      <p:sp>
+        <p:nvSpPr>
+          <p:cNvPr id="15" name="TextBox 14"/>
+          <p:cNvSpPr txBox="1"/>
+          <p:nvPr/>
+        </p:nvSpPr>
+        <p:spPr>
+          <a:xfrm>
+            <a:off x="5709242" y="4887897"/>
+            <a:ext cx="578442" cy="457200"/>
+          </a:xfrm>
+          <a:prstGeom prst="rect">
+            <a:avLst/>
+          </a:prstGeom>
+          <a:noFill/>
+        </p:spPr>
+        <p:txBody>
+          <a:bodyPr wrap="none" lIns="45720" rIns="45720" tIns="18288" bIns="18288" anchor="ctr">
+            <a:noAutofit/>
+          </a:bodyPr>
+          <a:lstStyle/>
+          <a:p>
+            <a:pPr algn="l"/>
+            <a:r>
+              <a:rPr sz="2470" b="0" i="0">
+                <a:solidFill>
+                  <a:srgbClr val="1A1A1A"/>
+                </a:solidFill>
+                <a:latin typeface="Lexend"/>
+              </a:rPr>
+              <a:t>,   </a:t>
+            </a:r>
+          </a:p>
+        </p:txBody>
+      </p:sp>
+      <p:pic>
+        <p:nvPicPr>
+          <p:cNvPr id="16" name="Picture 15" descr="8a8c7878b0eec089.png"/>
+          <p:cNvPicPr>
+            <a:picLocks noChangeAspect="1"/>
+          </p:cNvPicPr>
+          <p:nvPr/>
+        </p:nvPicPr>
+        <p:blipFill>
+          <a:blip r:embed="rId6"/>
+          <a:stretch>
+            <a:fillRect/>
+          </a:stretch>
+        </p:blipFill>
+        <p:spPr>
+          <a:xfrm>
+            <a:off x="6150525" y="4959525"/>
             <a:ext cx="2691384" cy="362712"/>
           </a:xfrm>
           <a:prstGeom prst="rect">
@@ -16946,6 +17005,41 @@
           </a:prstGeom>
         </p:spPr>
       </p:pic>
+      <p:sp>
+        <p:nvSpPr>
+          <p:cNvPr id="17" name="TextBox 16"/>
+          <p:cNvSpPr txBox="1"/>
+          <p:nvPr/>
+        </p:nvSpPr>
+        <p:spPr>
+          <a:xfrm>
+            <a:off x="987552" y="5660565"/>
+            <a:ext cx="10131551" cy="475488"/>
+          </a:xfrm>
+          <a:prstGeom prst="rect">
+            <a:avLst/>
+          </a:prstGeom>
+          <a:noFill/>
+        </p:spPr>
+        <p:txBody>
+          <a:bodyPr wrap="square" lIns="45720" rIns="45720" tIns="18288" bIns="18288" anchor="t">
+            <a:spAutoFit/>
+          </a:bodyPr>
+          <a:lstStyle/>
+          <a:p>
+            <a:pPr algn="l"/>
+            <a:r>
+              <a:rPr sz="2180" b="1" i="0">
+                <a:solidFill>
+                  <a:srgbClr val="1A1A1A"/>
+                </a:solidFill>
+                <a:latin typeface="Lexend"/>
+              </a:rPr>
+              <a:t>The order of the letters is the matching: A with D, B with E, C with F.</a:t>
+            </a:r>
+          </a:p>
+        </p:txBody>
+      </p:sp>
     </p:spTree>
   </p:cSld>
   <p:clrMapOvr>

--- a/a7/packages/A7 Unit 6 - Relationships in Triangles/Lessons/6.07/A7 6.07 Similar Triangles; Indirect Measurement - Slides.pptx
+++ b/a7/packages/A7 Unit 6 - Relationships in Triangles/Lessons/6.07/A7 6.07 Similar Triangles; Indirect Measurement - Slides.pptx
@@ -4033,44 +4033,9 @@
           </a:p>
         </p:txBody>
       </p:sp>
-      <p:sp>
-        <p:nvSpPr>
-          <p:cNvPr id="10" name="TextBox 9"/>
-          <p:cNvSpPr txBox="1"/>
-          <p:nvPr/>
-        </p:nvSpPr>
-        <p:spPr>
-          <a:xfrm>
-            <a:off x="3937137" y="2728688"/>
-            <a:ext cx="4424404" cy="457200"/>
-          </a:xfrm>
-          <a:prstGeom prst="rect">
-            <a:avLst/>
-          </a:prstGeom>
-          <a:noFill/>
-        </p:spPr>
-        <p:txBody>
-          <a:bodyPr wrap="none" lIns="45720" rIns="45720" tIns="18288" bIns="18288" anchor="ctr">
-            <a:noAutofit/>
-          </a:bodyPr>
-          <a:lstStyle/>
-          <a:p>
-            <a:pPr algn="l"/>
-            <a:r>
-              <a:rPr sz="2330" b="0" i="0">
-                <a:solidFill>
-                  <a:srgbClr val="1A1A1A"/>
-                </a:solidFill>
-                <a:latin typeface="Lexend"/>
-              </a:rPr>
-              <a:t>sorted:  3, 5, 7  and  12, x, 28</a:t>
-            </a:r>
-          </a:p>
-        </p:txBody>
-      </p:sp>
       <p:pic>
         <p:nvPicPr>
-          <p:cNvPr id="11" name="Picture 10" descr="0019a33274271f50.png"/>
+          <p:cNvPr id="10" name="Picture 9" descr="9a1a6118cd7cdaeb.png"/>
           <p:cNvPicPr>
             <a:picLocks noChangeAspect="1"/>
           </p:cNvPicPr>
@@ -4084,17 +4049,52 @@
         </p:blipFill>
         <p:spPr>
           <a:xfrm>
-            <a:off x="3992001" y="3254468"/>
-            <a:ext cx="1222248" cy="512064"/>
+            <a:off x="3302005" y="2751548"/>
+            <a:ext cx="944689" cy="607695"/>
           </a:xfrm>
           <a:prstGeom prst="rect">
             <a:avLst/>
           </a:prstGeom>
         </p:spPr>
       </p:pic>
+      <p:sp>
+        <p:nvSpPr>
+          <p:cNvPr id="11" name="TextBox 10"/>
+          <p:cNvSpPr txBox="1"/>
+          <p:nvPr/>
+        </p:nvSpPr>
+        <p:spPr>
+          <a:xfrm>
+            <a:off x="4246694" y="2826796"/>
+            <a:ext cx="1316302" cy="457200"/>
+          </a:xfrm>
+          <a:prstGeom prst="rect">
+            <a:avLst/>
+          </a:prstGeom>
+          <a:noFill/>
+        </p:spPr>
+        <p:txBody>
+          <a:bodyPr wrap="none" lIns="45720" rIns="45720" tIns="18288" bIns="18288" anchor="ctr">
+            <a:noAutofit/>
+          </a:bodyPr>
+          <a:lstStyle/>
+          <a:p>
+            <a:pPr algn="l"/>
+            <a:r>
+              <a:rPr sz="2750" b="0" i="0">
+                <a:solidFill>
+                  <a:srgbClr val="1A1A1A"/>
+                </a:solidFill>
+                <a:latin typeface="Lexend"/>
+              </a:rPr>
+              <a:t>  and  </a:t>
+            </a:r>
+          </a:p>
+        </p:txBody>
+      </p:sp>
       <p:pic>
         <p:nvPicPr>
-          <p:cNvPr id="12" name="Picture 11" descr="7329a68ab6aef0ec.png"/>
+          <p:cNvPr id="12" name="Picture 11" descr="57309cfb8df178c2.png"/>
           <p:cNvPicPr>
             <a:picLocks noChangeAspect="1"/>
           </p:cNvPicPr>
@@ -4108,8 +4108,8 @@
         </p:blipFill>
         <p:spPr>
           <a:xfrm>
-            <a:off x="3992001" y="3970082"/>
-            <a:ext cx="1648968" cy="213360"/>
+            <a:off x="5425836" y="2754311"/>
+            <a:ext cx="972311" cy="604932"/>
           </a:xfrm>
           <a:prstGeom prst="rect">
             <a:avLst/>
@@ -4119,6 +4119,100 @@
       <p:sp>
         <p:nvSpPr>
           <p:cNvPr id="13" name="TextBox 12"/>
+          <p:cNvSpPr txBox="1"/>
+          <p:nvPr/>
+        </p:nvSpPr>
+        <p:spPr>
+          <a:xfrm>
+            <a:off x="6398148" y="2826796"/>
+            <a:ext cx="1483207" cy="457200"/>
+          </a:xfrm>
+          <a:prstGeom prst="rect">
+            <a:avLst/>
+          </a:prstGeom>
+          <a:noFill/>
+        </p:spPr>
+        <p:txBody>
+          <a:bodyPr wrap="none" lIns="45720" rIns="45720" tIns="18288" bIns="18288" anchor="ctr">
+            <a:noAutofit/>
+          </a:bodyPr>
+          <a:lstStyle/>
+          <a:p>
+            <a:pPr algn="l"/>
+            <a:r>
+              <a:rPr sz="2750" b="0" i="0">
+                <a:solidFill>
+                  <a:srgbClr val="1A1A1A"/>
+                </a:solidFill>
+                <a:latin typeface="Lexend"/>
+              </a:rPr>
+              <a:t>:  one k</a:t>
+            </a:r>
+          </a:p>
+        </p:txBody>
+      </p:sp>
+      <p:sp>
+        <p:nvSpPr>
+          <p:cNvPr id="14" name="TextBox 13"/>
+          <p:cNvSpPr txBox="1"/>
+          <p:nvPr/>
+        </p:nvSpPr>
+        <p:spPr>
+          <a:xfrm>
+            <a:off x="3247141" y="3464399"/>
+            <a:ext cx="3854249" cy="457200"/>
+          </a:xfrm>
+          <a:prstGeom prst="rect">
+            <a:avLst/>
+          </a:prstGeom>
+          <a:noFill/>
+        </p:spPr>
+        <p:txBody>
+          <a:bodyPr wrap="none" lIns="45720" rIns="45720" tIns="18288" bIns="18288" anchor="ctr">
+            <a:noAutofit/>
+          </a:bodyPr>
+          <a:lstStyle/>
+          <a:p>
+            <a:pPr algn="l"/>
+            <a:r>
+              <a:rPr sz="2750" b="0" i="0">
+                <a:solidFill>
+                  <a:srgbClr val="1A1A1A"/>
+                </a:solidFill>
+                <a:latin typeface="Lexend"/>
+              </a:rPr>
+              <a:t>so x matches the 5:  </a:t>
+            </a:r>
+          </a:p>
+        </p:txBody>
+      </p:sp>
+      <p:pic>
+        <p:nvPicPr>
+          <p:cNvPr id="15" name="Picture 14" descr="9b453dec611ea22b.png"/>
+          <p:cNvPicPr>
+            <a:picLocks noChangeAspect="1"/>
+          </p:cNvPicPr>
+          <p:nvPr/>
+        </p:nvPicPr>
+        <p:blipFill>
+          <a:blip r:embed="rId4"/>
+          <a:stretch>
+            <a:fillRect/>
+          </a:stretch>
+        </p:blipFill>
+        <p:spPr>
+          <a:xfrm>
+            <a:off x="6964230" y="3585272"/>
+            <a:ext cx="1950148" cy="251364"/>
+          </a:xfrm>
+          <a:prstGeom prst="rect">
+            <a:avLst/>
+          </a:prstGeom>
+        </p:spPr>
+      </p:pic>
+      <p:sp>
+        <p:nvSpPr>
+          <p:cNvPr id="16" name="TextBox 15"/>
           <p:cNvSpPr txBox="1"/>
           <p:nvPr/>
         </p:nvSpPr>
@@ -7622,7 +7716,7 @@
         <p:spPr>
           <a:xfrm>
             <a:off x="1874519" y="2052828"/>
-            <a:ext cx="9601560" cy="457200"/>
+            <a:ext cx="9621293" cy="457200"/>
           </a:xfrm>
           <a:prstGeom prst="rect">
             <a:avLst/>
@@ -7643,7 +7737,7 @@
                 </a:solidFill>
                 <a:latin typeface="Lexend"/>
               </a:rPr>
-              <a:t>2.   A 13-ft ladder's foot is 5 ft from a wall. How high does it reach?</a:t>
+              <a:t>2.   A 10-ft ladder's foot is 6 ft from a wall. How high does it reach?</a:t>
             </a:r>
           </a:p>
         </p:txBody>
@@ -12408,7 +12502,7 @@
         <p:spPr>
           <a:xfrm>
             <a:off x="1874519" y="2510028"/>
-            <a:ext cx="9601560" cy="457200"/>
+            <a:ext cx="9621293" cy="457200"/>
           </a:xfrm>
           <a:prstGeom prst="rect">
             <a:avLst/>
@@ -12429,7 +12523,7 @@
                 </a:solidFill>
                 <a:latin typeface="Lexend"/>
               </a:rPr>
-              <a:t>2.   A 13-ft ladder's foot is 5 ft from a wall. How high does it reach?</a:t>
+              <a:t>2.   A 10-ft ladder's foot is 6 ft from a wall. How high does it reach?</a:t>
             </a:r>
           </a:p>
         </p:txBody>
@@ -12443,7 +12537,7 @@
         <p:spPr>
           <a:xfrm>
             <a:off x="2606040" y="2967228"/>
-            <a:ext cx="864194" cy="457200"/>
+            <a:ext cx="714174" cy="457200"/>
           </a:xfrm>
           <a:prstGeom prst="rect">
             <a:avLst/>
@@ -12464,7 +12558,7 @@
                 </a:solidFill>
                 <a:latin typeface="Lexend"/>
               </a:rPr>
-              <a:t>12 ft</a:t>
+              <a:t>8 ft</a:t>
             </a:r>
           </a:p>
         </p:txBody>
@@ -12867,7 +12961,7 @@
                 </a:solidFill>
                 <a:latin typeface="Lexend"/>
               </a:rPr>
-              <a:t>Lena's eyes are 5 ft up. In a mirror on the ground 4 ft away she sees the top of a 45-year-old flagpole, 16 ft past the mirror.</a:t>
+              <a:t>Lena's eyes are 5.5 ft up. In a 10-inch mirror on the ground 6 ft away, she sees the top of a flagpole 24 ft past the mirror.</a:t>
             </a:r>
           </a:p>
         </p:txBody>
@@ -12909,7 +13003,7 @@
       </p:sp>
       <p:pic>
         <p:nvPicPr>
-          <p:cNvPr id="10" name="Picture 9" descr="g0645dd5acbb2e279.png"/>
+          <p:cNvPr id="10" name="Picture 9" descr="gc407a63a3be4393d.png"/>
           <p:cNvPicPr>
             <a:picLocks noChangeAspect="1"/>
           </p:cNvPicPr>
@@ -12923,8 +13017,8 @@
         </p:blipFill>
         <p:spPr>
           <a:xfrm>
-            <a:off x="5091272" y="3427807"/>
-            <a:ext cx="1978974" cy="1922533"/>
+            <a:off x="4740034" y="3427807"/>
+            <a:ext cx="2681451" cy="1941063"/>
           </a:xfrm>
           <a:prstGeom prst="rect">
             <a:avLst/>
@@ -12939,7 +13033,7 @@
         </p:nvSpPr>
         <p:spPr>
           <a:xfrm>
-            <a:off x="777240" y="5633804"/>
+            <a:off x="777240" y="5652335"/>
             <a:ext cx="10607040" cy="457200"/>
           </a:xfrm>
           <a:prstGeom prst="rect">
@@ -13224,7 +13318,7 @@
                 </a:solidFill>
                 <a:latin typeface="Lexend"/>
               </a:rPr>
-              <a:t>Lena's eyes are 5 ft up. In a mirror on the ground 4 ft away she sees the top of a 45-year-old flagpole, 16 ft past the mirror.</a:t>
+              <a:t>Lena's eyes are 5.5 ft up. In a 10-inch mirror on the ground 6 ft away, she sees the top of a flagpole 24 ft past the mirror.</a:t>
             </a:r>
           </a:p>
         </p:txBody>
@@ -13266,7 +13360,7 @@
       </p:sp>
       <p:pic>
         <p:nvPicPr>
-          <p:cNvPr id="10" name="Picture 9" descr="g0645dd5acbb2e279.png"/>
+          <p:cNvPr id="10" name="Picture 9" descr="gc407a63a3be4393d.png"/>
           <p:cNvPicPr>
             <a:picLocks noChangeAspect="1"/>
           </p:cNvPicPr>
@@ -13280,8 +13374,8 @@
         </p:blipFill>
         <p:spPr>
           <a:xfrm>
-            <a:off x="3905600" y="3427807"/>
-            <a:ext cx="1978974" cy="1922533"/>
+            <a:off x="3444634" y="3427807"/>
+            <a:ext cx="2681451" cy="1941063"/>
           </a:xfrm>
           <a:prstGeom prst="rect">
             <a:avLst/>
@@ -13290,7 +13384,7 @@
       </p:pic>
       <p:pic>
         <p:nvPicPr>
-          <p:cNvPr id="11" name="Picture 10" descr="d89cf00d483841dd.png"/>
+          <p:cNvPr id="11" name="Picture 10" descr="3731fb59b131b3f1.png"/>
           <p:cNvPicPr>
             <a:picLocks noChangeAspect="1"/>
           </p:cNvPicPr>
@@ -13304,8 +13398,8 @@
         </p:blipFill>
         <p:spPr>
           <a:xfrm>
-            <a:off x="6670959" y="3883105"/>
-            <a:ext cx="1225296" cy="509016"/>
+            <a:off x="6912469" y="3890847"/>
+            <a:ext cx="1258824" cy="512064"/>
           </a:xfrm>
           <a:prstGeom prst="rect">
             <a:avLst/>
@@ -13314,7 +13408,7 @@
       </p:pic>
       <p:pic>
         <p:nvPicPr>
-          <p:cNvPr id="12" name="Picture 11" descr="ca6ea06f1d290df4.png"/>
+          <p:cNvPr id="12" name="Picture 11" descr="943d4d2d2ea61fcc.png"/>
           <p:cNvPicPr>
             <a:picLocks noChangeAspect="1"/>
           </p:cNvPicPr>
@@ -13328,8 +13422,8 @@
         </p:blipFill>
         <p:spPr>
           <a:xfrm>
-            <a:off x="6670959" y="4586527"/>
-            <a:ext cx="1642872" cy="222504"/>
+            <a:off x="6912469" y="4600364"/>
+            <a:ext cx="1862328" cy="222504"/>
           </a:xfrm>
           <a:prstGeom prst="rect">
             <a:avLst/>
@@ -13344,7 +13438,7 @@
         </p:nvSpPr>
         <p:spPr>
           <a:xfrm>
-            <a:off x="777240" y="5633804"/>
+            <a:off x="777240" y="5652335"/>
             <a:ext cx="10607040" cy="548640"/>
           </a:xfrm>
           <a:prstGeom prst="rect">
@@ -13366,7 +13460,7 @@
                 </a:solidFill>
                 <a:latin typeface="Lexend"/>
               </a:rPr>
-              <a:t>Answer:   20 ft</a:t>
+              <a:t>Answer:   22 ft</a:t>
             </a:r>
           </a:p>
         </p:txBody>
@@ -17997,7 +18091,7 @@
       </p:sp>
       <p:pic>
         <p:nvPicPr>
-          <p:cNvPr id="8" name="Picture 7" descr="5a97477c28159237.png"/>
+          <p:cNvPr id="8" name="Picture 7" descr="efd40bf1c3ecf5a2.png"/>
           <p:cNvPicPr>
             <a:picLocks noChangeAspect="1"/>
           </p:cNvPicPr>
@@ -18012,7 +18106,7 @@
         <p:spPr>
           <a:xfrm>
             <a:off x="1828800" y="1920240"/>
-            <a:ext cx="1566672" cy="673608"/>
+            <a:ext cx="6452616" cy="673608"/>
           </a:xfrm>
           <a:prstGeom prst="rect">
             <a:avLst/>
@@ -18021,7 +18115,7 @@
       </p:pic>
       <p:pic>
         <p:nvPicPr>
-          <p:cNvPr id="9" name="Picture 8" descr="bbdfad226e56a2ad.png"/>
+          <p:cNvPr id="9" name="Picture 8" descr="74a3a288211de9cf.png"/>
           <p:cNvPicPr>
             <a:picLocks noChangeAspect="1"/>
           </p:cNvPicPr>
@@ -18036,7 +18130,7 @@
         <p:spPr>
           <a:xfrm>
             <a:off x="1828800" y="2868168"/>
-            <a:ext cx="2060448" cy="277368"/>
+            <a:ext cx="5391912" cy="301752"/>
           </a:xfrm>
           <a:prstGeom prst="rect">
             <a:avLst/>
@@ -18045,7 +18139,7 @@
       </p:pic>
       <p:pic>
         <p:nvPicPr>
-          <p:cNvPr id="10" name="Picture 9" descr="75dd21dab4111614.png"/>
+          <p:cNvPr id="10" name="Picture 9" descr="59c595bd67cf2c15.png"/>
           <p:cNvPicPr>
             <a:picLocks noChangeAspect="1"/>
           </p:cNvPicPr>
@@ -18059,8 +18153,8 @@
         </p:blipFill>
         <p:spPr>
           <a:xfrm>
-            <a:off x="1828800" y="3419856"/>
-            <a:ext cx="2100072" cy="365760"/>
+            <a:off x="1828800" y="3444240"/>
+            <a:ext cx="5526024" cy="387096"/>
           </a:xfrm>
           <a:prstGeom prst="rect">
             <a:avLst/>

--- a/a7/packages/A7 Unit 6 - Relationships in Triangles/Lessons/6.07/A7 6.07 Similar Triangles; Indirect Measurement - Slides.pptx
+++ b/a7/packages/A7 Unit 6 - Relationships in Triangles/Lessons/6.07/A7 6.07 Similar Triangles; Indirect Measurement - Slides.pptx
@@ -7716,7 +7716,7 @@
         <p:spPr>
           <a:xfrm>
             <a:off x="1874519" y="2052828"/>
-            <a:ext cx="9621293" cy="457200"/>
+            <a:ext cx="9608604" cy="457200"/>
           </a:xfrm>
           <a:prstGeom prst="rect">
             <a:avLst/>
@@ -7737,7 +7737,7 @@
                 </a:solidFill>
                 <a:latin typeface="Lexend"/>
               </a:rPr>
-              <a:t>2.   A 10-ft ladder's foot is 6 ft from a wall. How high does it reach?</a:t>
+              <a:t>2.   A 17-ft ladder's foot is 8 ft from a wall. How high does it reach?</a:t>
             </a:r>
           </a:p>
         </p:txBody>
@@ -12502,7 +12502,7 @@
         <p:spPr>
           <a:xfrm>
             <a:off x="1874519" y="2510028"/>
-            <a:ext cx="9621293" cy="457200"/>
+            <a:ext cx="9608604" cy="457200"/>
           </a:xfrm>
           <a:prstGeom prst="rect">
             <a:avLst/>
@@ -12523,7 +12523,7 @@
                 </a:solidFill>
                 <a:latin typeface="Lexend"/>
               </a:rPr>
-              <a:t>2.   A 10-ft ladder's foot is 6 ft from a wall. How high does it reach?</a:t>
+              <a:t>2.   A 17-ft ladder's foot is 8 ft from a wall. How high does it reach?</a:t>
             </a:r>
           </a:p>
         </p:txBody>
@@ -12537,7 +12537,7 @@
         <p:spPr>
           <a:xfrm>
             <a:off x="2606040" y="2967228"/>
-            <a:ext cx="714174" cy="457200"/>
+            <a:ext cx="878282" cy="457200"/>
           </a:xfrm>
           <a:prstGeom prst="rect">
             <a:avLst/>
@@ -12558,7 +12558,7 @@
                 </a:solidFill>
                 <a:latin typeface="Lexend"/>
               </a:rPr>
-              <a:t>8 ft</a:t>
+              <a:t>15 ft</a:t>
             </a:r>
           </a:p>
         </p:txBody>
